--- a/output/SS_Generic_Jewellery.pptx
+++ b/output/SS_Generic_Jewellery.pptx
@@ -9887,7 +9887,7 @@
                           <a:cs typeface="Inter"/>
                           <a:sym typeface="Inter"/>
                         </a:rPr>
-                        <a:t>22kt, BIS hallmark, antique, temple choker under 50000</a:t>
+                        <a:t>22kt, BIS hallmark, antique, temple choker, within budget</a:t>
                       </a:r>
                       <a:endParaRPr sz="1000" u="none" cap="none" strike="noStrike">
                         <a:latin typeface="Inter"/>
@@ -12845,7 +12845,7 @@
                 <a:cs typeface="Inter"/>
                 <a:sym typeface="Inter"/>
               </a:rPr>
-              <a:t xml:space="preserve"> — pioneer AR virtual try-on since 2015, 200% app usage increase, 40% of business from AR app. Rs 883 Cr quarterly revenue.</a:t>
+              <a:t xml:space="preserve"> — pioneer AR virtual try-on since 2015, 200% app usage increase, 40% of business from AR app. $100M+ quarterly revenue.</a:t>
             </a:r>
           </a:p>
           <a:p>
@@ -12931,7 +12931,7 @@
                 <a:cs typeface="Inter"/>
                 <a:sym typeface="Inter"/>
               </a:rPr>
-              <a:t xml:space="preserve"> — AI/ML for UX, AR try-on, blockchain authentication. SEBI-approved ₹1,000 Cr IPO.</a:t>
+              <a:t xml:space="preserve"> — AI/ML for UX, AR try-on, blockchain authentication. SEBI-approved $120M IPO.</a:t>
             </a:r>
           </a:p>
           <a:p>
@@ -13768,7 +13768,7 @@
                 <a:cs typeface="Inter"/>
                 <a:sym typeface="Inter"/>
               </a:rPr>
-              <a:t>What an AI Shopping Assistant changes :  “I need a lightweight gold necklace under 30000, 22kt BIS hallmark, minimalist for daily wear, that won’t tangle”</a:t>
+              <a:t>What an AI Shopping Assistant changes :  “I need a lightweight gold necklace within budget, 22kt BIS hallmark, minimalist for daily wear, that won’t tangle”</a:t>
             </a:r>
             <a:endParaRPr b="0" i="0" sz="1100" u="none" cap="none" strike="noStrike">
               <a:solidFill>
@@ -14657,7 +14657,7 @@
                 <a:cs typeface="Inter"/>
                 <a:sym typeface="Inter"/>
               </a:rPr>
-              <a:t>Unlike traditional search bars that only cater to keyword matching for direct queries like “gold choker necklace” or “antique kundan bridal set”, AI chat assistants need to answer intent based queries like “I need jewellery for my wedding” or “I want earrings that won’t irritate sensitive ears”. They have to map buyer intent to keywords using a knowledge graph and then search the catalog for relevant products using keywords, refer to the diagram in the next slide for an example</a:t>
+              <a:t>Unlike traditional search bars that only cater to keyword matching for direct queries like “gold choker necklace” or “antique kundan bridal set”, AI chat assistants need to answer intent based queries like “I need jewellery for my wedding” or “I want earrings that won’t irritate sensitive ears”. They have to map buyer intent to keywords using a knowledge graph and then search the catalog for relevant products using keywords, refer to the diagram on slide 11 for an example</a:t>
             </a:r>
             <a:endParaRPr b="0" i="0" sz="1200" u="none" cap="none" strike="noStrike">
               <a:solidFill>

--- a/output/SS_Generic_Jewellery.pptx
+++ b/output/SS_Generic_Jewellery.pptx
@@ -13935,16 +13935,17 @@
       </p:sp>
       <p:pic>
         <p:nvPicPr>
-          <p:cNvPr id="59" name="Google Shape;59;p4" title="Screenshot 2026-04-14 at 9.08.05 PM.png"/>
-          <p:cNvPicPr preferRelativeResize="0"/>
+          <p:cNvPr id="59" name="Picture 58" descr="jewellery_table.png"/>
+          <p:cNvPicPr>
+            <a:picLocks noChangeAspect="1"/>
+          </p:cNvPicPr>
           <p:nvPr/>
         </p:nvPicPr>
-        <p:blipFill rotWithShape="1">
-          <a:blip r:embed="rId3">
-            <a:alphaModFix/>
-          </a:blip>
-          <a:srcRect b="0" l="0" r="0" t="0"/>
-          <a:stretch/>
+        <p:blipFill>
+          <a:blip r:embed="rId4"/>
+          <a:stretch>
+            <a:fillRect/>
+          </a:stretch>
         </p:blipFill>
         <p:spPr>
           <a:xfrm>
@@ -13954,10 +13955,6 @@
           <a:prstGeom prst="rect">
             <a:avLst/>
           </a:prstGeom>
-          <a:noFill/>
-          <a:ln>
-            <a:noFill/>
-          </a:ln>
         </p:spPr>
       </p:pic>
     </p:spTree>

--- a/output/SS_Generic_Jewellery.pptx
+++ b/output/SS_Generic_Jewellery.pptx
@@ -6259,7 +6259,7 @@
                 <a:cs typeface="Inter"/>
                 <a:sym typeface="Inter"/>
               </a:rPr>
-              <a:t>An AI shopping assistant doesn't just search — it sells</a:t>
+              <a:t>Your AI sales associate doesn't just search — it sells</a:t>
             </a:r>
             <a:endParaRPr b="0" i="0" sz="2300" u="none" cap="none" strike="noStrike">
               <a:solidFill>
@@ -6450,7 +6450,7 @@
                 <a:cs typeface="Inter"/>
                 <a:sym typeface="Inter"/>
               </a:rPr>
-              <a:t>Clarifies intent instead of dumping a catalog — asks the right follow-up questions (occasion, budget, use-case, size/fit) before suggesting anything.</a:t>
+              <a:t>Like your best sales associate, it clarifies intent instead of dumping a catalog — asks the right follow-up questions (occasion, budget, use-case, size/fit) before suggesting anything.</a:t>
             </a:r>
             <a:endParaRPr b="0" i="0" sz="1100" u="none" cap="none" strike="noStrike">
               <a:solidFill>
@@ -13768,7 +13768,7 @@
                 <a:cs typeface="Inter"/>
                 <a:sym typeface="Inter"/>
               </a:rPr>
-              <a:t>What an AI Shopping Assistant changes :  “I need a lightweight gold necklace within budget, 22kt BIS hallmark, minimalist for daily wear, that won’t tangle”</a:t>
+              <a:t>What an AI Sales Associate changes :  “I need a lightweight gold necklace within budget, 22kt BIS hallmark, minimalist for daily wear, that won’t tangle”</a:t>
             </a:r>
             <a:endParaRPr b="0" i="0" sz="1100" u="none" cap="none" strike="noStrike">
               <a:solidFill>
@@ -13808,7 +13808,7 @@
                 <a:cs typeface="Inter"/>
                 <a:sym typeface="Inter"/>
               </a:rPr>
-              <a:t>An AI shopping assistant powered by a knowledge graph understands intent + constraints + context, it maps lightweight to under 10g, daily wear to minimalist/durable, adds the conditions for karat, hallmark, and price and returns relevant products from the catalog - exactly what the shopper means and wants, not just what they typed.</a:t>
+              <a:t>An AI sales associate powered by a knowledge graph understands intent + constraints + context, it maps lightweight to under 10g, daily wear to minimalist/durable, adds the conditions for karat, hallmark, and price and returns relevant products from the catalog - exactly what the shopper means and wants, not just what they typed.</a:t>
             </a:r>
             <a:endParaRPr b="0" i="0" sz="1100" u="none" cap="none" strike="noStrike">
               <a:solidFill>
@@ -15986,7 +15986,7 @@
                 <a:cs typeface="Inter"/>
                 <a:sym typeface="Inter"/>
               </a:rPr>
-              <a:t>AI Shopping Assistant on Website that can understand user intent</a:t>
+              <a:t>AI Sales Associate on your website that guides buyers to the right purchase</a:t>
             </a:r>
             <a:endParaRPr b="0" i="0" sz="1600" u="none" cap="none" strike="noStrike">
               <a:solidFill>
@@ -16052,7 +16052,7 @@
                 <a:cs typeface="Inter"/>
                 <a:sym typeface="Inter"/>
               </a:rPr>
-              <a:t>Chat-based shopping: voice, image, and text input</a:t>
+              <a:t>Acts as a digital sales associate — asks the right questions, understands what the buyer actually needs, and guides them to the right product</a:t>
             </a:r>
             <a:endParaRPr b="0" i="0" sz="1300" u="none" cap="none" strike="noStrike">
               <a:solidFill>
@@ -16092,7 +16092,7 @@
                 <a:cs typeface="Inter"/>
                 <a:sym typeface="Inter"/>
               </a:rPr>
-              <a:t>Lower cost per query - Graph handles 90%+ of queries, LLM tokens only for edge cases</a:t>
+              <a:t>Drives revenue, not just answers — every conversation is a guided selling opportunity that converts browsers into buyers</a:t>
             </a:r>
             <a:endParaRPr b="0" i="0" sz="1300" u="none" cap="none" strike="noStrike">
               <a:solidFill>
@@ -16132,7 +16132,7 @@
                 <a:cs typeface="Inter"/>
                 <a:sym typeface="Inter"/>
               </a:rPr>
-              <a:t>All intent based queries such as “jewellery for a South Indian wedding”, “lightweight earrings for daily wear” handled just like in ChatGPT and Amazon Rufus, giving buyer a full conversational experience.</a:t>
+              <a:t>All intent based queries such as “jewellery for a South Indian wedding”, “lightweight earrings for daily wear” handled just like in ChatGPT and Amazon Rufus, guiding buyers to a purchase just like your best in-store sales associate would.</a:t>
             </a:r>
             <a:endParaRPr b="0" i="0" sz="1300" u="none" cap="none" strike="noStrike">
               <a:solidFill>

--- a/output/SS_Generic_Jewellery.pptx
+++ b/output/SS_Generic_Jewellery.pptx
@@ -4875,7 +4875,7 @@
                 <a:cs typeface="Inter"/>
                 <a:sym typeface="Inter"/>
               </a:rPr>
-              <a:t>Conversational AI shopping assistants for for e-commerce websites</a:t>
+              <a:t>Conversational AI shopping assistants for e-commerce websites</a:t>
             </a:r>
             <a:endParaRPr b="0" i="0" sz="1600" u="none" cap="none" strike="noStrike">
               <a:solidFill>
@@ -6450,7 +6450,7 @@
                 <a:cs typeface="Inter"/>
                 <a:sym typeface="Inter"/>
               </a:rPr>
-              <a:t>Like your best sales associate, it clarifies intent instead of dumping a catalog — asks the right follow-up questions (occasion, budget, use-case, size/fit) before suggesting anything.</a:t>
+              <a:t>Like your best sales associate, it clarifies intent instead of dumping a catalog — asks the right follow-up questions (occasion, budget, metal/purity, style) before suggesting anything.</a:t>
             </a:r>
             <a:endParaRPr b="0" i="0" sz="1100" u="none" cap="none" strike="noStrike">
               <a:solidFill>
@@ -6655,7 +6655,7 @@
                 <a:cs typeface="Inter"/>
                 <a:sym typeface="Inter"/>
               </a:rPr>
-              <a:t>Stylist-grade cross-sell → AOV lift</a:t>
+              <a:t>Jeweller-grade set-building → AOV lift</a:t>
             </a:r>
             <a:endParaRPr b="0" i="0" u="none" cap="none" strike="noStrike">
               <a:solidFill>
@@ -10467,7 +10467,7 @@
                 <a:cs typeface="Inter"/>
                 <a:sym typeface="Inter"/>
               </a:rPr>
-              <a:t>We can run a full 500-query audit on your site in under a week and show you exactly where you are losing crores in revenue..</a:t>
+              <a:t>We can run a full 500-query audit on your site in under a week and show you exactly where you are losing crores in revenue.</a:t>
             </a:r>
             <a:endParaRPr b="0" i="0" sz="1500" u="none" cap="none" strike="noStrike">
               <a:solidFill>
@@ -14397,7 +14397,7 @@
                 <a:cs typeface="Inter"/>
                 <a:sym typeface="Inter"/>
               </a:rPr>
-              <a:t>Catalogs today don't expose attributes such as karat/purity and tags such as “hallmark” or “antique finish” which an AI agent needs to map intent such as “jewellery for a South Indian wedding”  to “22kt temple gold jhumka” or “for a Maharashtrian mangalsutra” to “hypoallergenic daily-wear earring”.</a:t>
+              <a:t>Catalogs today don't expose attributes such as karat/purity and tags such as “hallmark” or “antique finish” which an AI agent needs to map intent such as “jewellery for a South Indian wedding”  to “22kt temple gold jhumka” or “for sensitive ears that won’t react” to “22kt Maharashtrian black-bead mangalsutra”.</a:t>
             </a:r>
             <a:endParaRPr b="0" i="0" sz="1200" u="none" cap="none" strike="noStrike">
               <a:solidFill>
@@ -16773,7 +16773,7 @@
             </a:pPr>
             <a:r>
               <a:rPr b="1" lang="en-US" sz="2000"/>
-              <a:t>The future of e-commerce - shopping assistants, virtual try-on, multilingual queries and discovery through apps on LLM platforms.</a:t>
+              <a:t>The future of e-commerce - shopping assistants, AR jewellery try-on, multilingual queries and discovery through apps on LLM platforms.</a:t>
             </a:r>
             <a:endParaRPr b="1" sz="2000"/>
           </a:p>
@@ -16815,15 +16815,7 @@
             </a:pPr>
             <a:r>
               <a:rPr lang="en-US"/>
-              <a:t xml:space="preserve">Buyers today are increasingly looking for virtual try-on to make more informed </a:t>
-            </a:r>
-            <a:r>
-              <a:rPr lang="en-US"/>
-              <a:t>decisions</a:t>
-            </a:r>
-            <a:r>
-              <a:rPr lang="en-US"/>
-              <a:t>.</a:t>
+              <a:t xml:space="preserve">Buyers today are increasingly looking for AR jewellery try-on to make more informed decisions.</a:t>
             </a:r>
             <a:endParaRPr/>
           </a:p>
